--- a/examples/relatorio-de-vendas.pptx
+++ b/examples/relatorio-de-vendas.pptx
@@ -258,7 +258,7 @@
       <c:catAx>
         <c:axId val="-2068027336"/>
         <c:scaling>
-          <c:orientation val="minMax"/>
+          <c:orientation val="maxMin"/>
         </c:scaling>
         <c:delete val="0"/>
         <c:axPos val="l"/>
@@ -328,7 +328,7 @@
           </a:p>
         </c:txPr>
         <c:crossAx val="-2068027336"/>
-        <c:crosses val="autoZero"/>
+        <c:crosses val="max"/>
       </c:valAx>
     </c:plotArea>
     <c:legend>
@@ -469,7 +469,7 @@
       <c:catAx>
         <c:axId val="-2068027336"/>
         <c:scaling>
-          <c:orientation val="minMax"/>
+          <c:orientation val="maxMin"/>
         </c:scaling>
         <c:delete val="0"/>
         <c:axPos val="l"/>
@@ -539,7 +539,7 @@
           </a:p>
         </c:txPr>
         <c:crossAx val="-2068027336"/>
-        <c:crosses val="autoZero"/>
+        <c:crosses val="max"/>
       </c:valAx>
     </c:plotArea>
     <c:dispBlanksAs val="gap"/>
@@ -4473,7 +4473,7 @@
           <a:p>
             <a:pPr algn="l"/>
             <a:r>
-              <a:rPr sz="4000" b="1" i="0">
+              <a:rPr sz="3000" b="1" i="0">
                 <a:solidFill>
                   <a:srgbClr val="2D2D2D"/>
                 </a:solidFill>
@@ -4666,7 +4666,7 @@
           <a:p>
             <a:pPr algn="l"/>
             <a:r>
-              <a:rPr sz="4000" b="1" i="0">
+              <a:rPr sz="2500" b="1" i="0">
                 <a:solidFill>
                   <a:srgbClr val="2D2D2D"/>
                 </a:solidFill>

--- a/examples/relatorio-de-vendas.pptx
+++ b/examples/relatorio-de-vendas.pptx
@@ -3606,8 +3606,8 @@
         </p:nvSpPr>
         <p:spPr>
           <a:xfrm>
-            <a:off x="731520" y="2194560"/>
-            <a:ext cx="10698480" cy="1463040"/>
+            <a:off x="731520" y="1920240"/>
+            <a:ext cx="10698480" cy="1737360"/>
           </a:xfrm>
           <a:prstGeom prst="rect">
             <a:avLst/>
@@ -3664,6 +3664,41 @@
                 <a:latin typeface="Segoe UI"/>
               </a:rPr>
               <a:t>Diretoria Comercial</a:t>
+            </a:r>
+          </a:p>
+        </p:txBody>
+      </p:sp>
+      <p:sp>
+        <p:nvSpPr>
+          <p:cNvPr id="5" name="TextBox 4"/>
+          <p:cNvSpPr txBox="1"/>
+          <p:nvPr/>
+        </p:nvSpPr>
+        <p:spPr>
+          <a:xfrm>
+            <a:off x="731520" y="5669280"/>
+            <a:ext cx="10698480" cy="457200"/>
+          </a:xfrm>
+          <a:prstGeom prst="rect">
+            <a:avLst/>
+          </a:prstGeom>
+          <a:noFill/>
+        </p:spPr>
+        <p:txBody>
+          <a:bodyPr wrap="square" anchor="t" lIns="45720" rIns="45720" tIns="27432" bIns="27432">
+            <a:spAutoFit/>
+          </a:bodyPr>
+          <a:lstStyle/>
+          <a:p>
+            <a:pPr algn="l"/>
+            <a:r>
+              <a:rPr sz="1300" b="0" i="0">
+                <a:solidFill>
+                  <a:srgbClr val="BFC9D4"/>
+                </a:solidFill>
+                <a:latin typeface="Segoe UI"/>
+              </a:rPr>
+              <a:t>2026-09-01</a:t>
             </a:r>
           </a:p>
         </p:txBody>
@@ -3727,8 +3762,8 @@
         </p:nvSpPr>
         <p:spPr>
           <a:xfrm>
-            <a:off x="10817352" y="6217920"/>
-            <a:ext cx="914400" cy="365760"/>
+            <a:off x="7772400" y="91440"/>
+            <a:ext cx="3959352" cy="228600"/>
           </a:xfrm>
           <a:prstGeom prst="rect">
             <a:avLst/>
@@ -3743,6 +3778,41 @@
           <a:p>
             <a:pPr algn="r"/>
             <a:r>
+              <a:rPr sz="900" b="0" i="0">
+                <a:solidFill>
+                  <a:srgbClr val="858585"/>
+                </a:solidFill>
+                <a:latin typeface="Segoe UI"/>
+              </a:rPr>
+              <a:t>2026-09-01</a:t>
+            </a:r>
+          </a:p>
+        </p:txBody>
+      </p:sp>
+      <p:sp>
+        <p:nvSpPr>
+          <p:cNvPr id="4" name="TextBox 3"/>
+          <p:cNvSpPr txBox="1"/>
+          <p:nvPr/>
+        </p:nvSpPr>
+        <p:spPr>
+          <a:xfrm>
+            <a:off x="10817352" y="6217920"/>
+            <a:ext cx="914400" cy="365760"/>
+          </a:xfrm>
+          <a:prstGeom prst="rect">
+            <a:avLst/>
+          </a:prstGeom>
+          <a:noFill/>
+        </p:spPr>
+        <p:txBody>
+          <a:bodyPr wrap="square" anchor="ctr" lIns="45720" rIns="45720" tIns="27432" bIns="27432">
+            <a:spAutoFit/>
+          </a:bodyPr>
+          <a:lstStyle/>
+          <a:p>
+            <a:pPr algn="r"/>
+            <a:r>
               <a:rPr sz="1000" b="0" i="0">
                 <a:solidFill>
                   <a:srgbClr val="858585"/>
@@ -3756,7 +3826,7 @@
       </p:sp>
       <p:sp>
         <p:nvSpPr>
-          <p:cNvPr id="4" name="Rectangle 3"/>
+          <p:cNvPr id="5" name="Rectangle 4"/>
           <p:cNvSpPr/>
           <p:nvPr/>
         </p:nvSpPr>
@@ -3800,7 +3870,7 @@
       </p:sp>
       <p:sp>
         <p:nvSpPr>
-          <p:cNvPr id="5" name="Rectangle 4"/>
+          <p:cNvPr id="6" name="Rectangle 5"/>
           <p:cNvSpPr/>
           <p:nvPr/>
         </p:nvSpPr>
@@ -3844,7 +3914,7 @@
       </p:sp>
       <p:sp>
         <p:nvSpPr>
-          <p:cNvPr id="6" name="TextBox 5"/>
+          <p:cNvPr id="7" name="TextBox 6"/>
           <p:cNvSpPr txBox="1"/>
           <p:nvPr/>
         </p:nvSpPr>
@@ -3879,7 +3949,7 @@
       </p:sp>
       <p:sp>
         <p:nvSpPr>
-          <p:cNvPr id="7" name="Oval 6"/>
+          <p:cNvPr id="8" name="Oval 7"/>
           <p:cNvSpPr/>
           <p:nvPr/>
         </p:nvSpPr>
@@ -3932,7 +4002,7 @@
       </p:sp>
       <p:sp>
         <p:nvSpPr>
-          <p:cNvPr id="8" name="TextBox 7"/>
+          <p:cNvPr id="9" name="TextBox 8"/>
           <p:cNvSpPr txBox="1"/>
           <p:nvPr/>
         </p:nvSpPr>
@@ -3967,7 +4037,7 @@
       </p:sp>
       <p:sp>
         <p:nvSpPr>
-          <p:cNvPr id="9" name="Oval 8"/>
+          <p:cNvPr id="10" name="Oval 9"/>
           <p:cNvSpPr/>
           <p:nvPr/>
         </p:nvSpPr>
@@ -4020,7 +4090,7 @@
       </p:sp>
       <p:sp>
         <p:nvSpPr>
-          <p:cNvPr id="10" name="TextBox 9"/>
+          <p:cNvPr id="11" name="TextBox 10"/>
           <p:cNvSpPr txBox="1"/>
           <p:nvPr/>
         </p:nvSpPr>
@@ -4055,7 +4125,7 @@
       </p:sp>
       <p:sp>
         <p:nvSpPr>
-          <p:cNvPr id="11" name="Oval 10"/>
+          <p:cNvPr id="12" name="Oval 11"/>
           <p:cNvSpPr/>
           <p:nvPr/>
         </p:nvSpPr>
@@ -4108,7 +4178,7 @@
       </p:sp>
       <p:sp>
         <p:nvSpPr>
-          <p:cNvPr id="12" name="TextBox 11"/>
+          <p:cNvPr id="13" name="TextBox 12"/>
           <p:cNvSpPr txBox="1"/>
           <p:nvPr/>
         </p:nvSpPr>
@@ -4143,7 +4213,7 @@
       </p:sp>
       <p:sp>
         <p:nvSpPr>
-          <p:cNvPr id="13" name="Rectangle 12"/>
+          <p:cNvPr id="14" name="Rectangle 13"/>
           <p:cNvSpPr/>
           <p:nvPr/>
         </p:nvSpPr>
@@ -4189,7 +4259,7 @@
       </p:sp>
       <p:sp>
         <p:nvSpPr>
-          <p:cNvPr id="14" name="TextBox 13"/>
+          <p:cNvPr id="15" name="TextBox 14"/>
           <p:cNvSpPr txBox="1"/>
           <p:nvPr/>
         </p:nvSpPr>
@@ -4299,8 +4369,8 @@
         </p:nvSpPr>
         <p:spPr>
           <a:xfrm>
-            <a:off x="10817352" y="6217920"/>
-            <a:ext cx="914400" cy="365760"/>
+            <a:off x="7772400" y="91440"/>
+            <a:ext cx="3959352" cy="228600"/>
           </a:xfrm>
           <a:prstGeom prst="rect">
             <a:avLst/>
@@ -4315,6 +4385,41 @@
           <a:p>
             <a:pPr algn="r"/>
             <a:r>
+              <a:rPr sz="900" b="0" i="0">
+                <a:solidFill>
+                  <a:srgbClr val="858585"/>
+                </a:solidFill>
+                <a:latin typeface="Segoe UI"/>
+              </a:rPr>
+              <a:t>2026-09-01</a:t>
+            </a:r>
+          </a:p>
+        </p:txBody>
+      </p:sp>
+      <p:sp>
+        <p:nvSpPr>
+          <p:cNvPr id="4" name="TextBox 3"/>
+          <p:cNvSpPr txBox="1"/>
+          <p:nvPr/>
+        </p:nvSpPr>
+        <p:spPr>
+          <a:xfrm>
+            <a:off x="10817352" y="6217920"/>
+            <a:ext cx="914400" cy="365760"/>
+          </a:xfrm>
+          <a:prstGeom prst="rect">
+            <a:avLst/>
+          </a:prstGeom>
+          <a:noFill/>
+        </p:spPr>
+        <p:txBody>
+          <a:bodyPr wrap="square" anchor="ctr" lIns="45720" rIns="45720" tIns="27432" bIns="27432">
+            <a:spAutoFit/>
+          </a:bodyPr>
+          <a:lstStyle/>
+          <a:p>
+            <a:pPr algn="r"/>
+            <a:r>
               <a:rPr sz="1000" b="0" i="0">
                 <a:solidFill>
                   <a:srgbClr val="858585"/>
@@ -4328,7 +4433,7 @@
       </p:sp>
       <p:sp>
         <p:nvSpPr>
-          <p:cNvPr id="4" name="Rectangle 3"/>
+          <p:cNvPr id="5" name="Rectangle 4"/>
           <p:cNvSpPr/>
           <p:nvPr/>
         </p:nvSpPr>
@@ -4372,7 +4477,7 @@
       </p:sp>
       <p:sp>
         <p:nvSpPr>
-          <p:cNvPr id="5" name="Rectangle 4"/>
+          <p:cNvPr id="6" name="Rectangle 5"/>
           <p:cNvSpPr/>
           <p:nvPr/>
         </p:nvSpPr>
@@ -4416,7 +4521,7 @@
       </p:sp>
       <p:sp>
         <p:nvSpPr>
-          <p:cNvPr id="6" name="TextBox 5"/>
+          <p:cNvPr id="7" name="TextBox 6"/>
           <p:cNvSpPr txBox="1"/>
           <p:nvPr/>
         </p:nvSpPr>
@@ -4451,7 +4556,7 @@
       </p:sp>
       <p:sp>
         <p:nvSpPr>
-          <p:cNvPr id="7" name="TextBox 6"/>
+          <p:cNvPr id="8" name="TextBox 7"/>
           <p:cNvSpPr txBox="1"/>
           <p:nvPr/>
         </p:nvSpPr>
@@ -4486,14 +4591,14 @@
       </p:sp>
       <p:sp>
         <p:nvSpPr>
-          <p:cNvPr id="8" name="TextBox 7"/>
+          <p:cNvPr id="9" name="TextBox 8"/>
           <p:cNvSpPr txBox="1"/>
           <p:nvPr/>
         </p:nvSpPr>
         <p:spPr>
           <a:xfrm>
-            <a:off x="594360" y="3337560"/>
-            <a:ext cx="2338578" cy="457200"/>
+            <a:off x="594360" y="3154680"/>
+            <a:ext cx="2338578" cy="411480"/>
           </a:xfrm>
           <a:prstGeom prst="rect">
             <a:avLst/>
@@ -4521,7 +4626,7 @@
       </p:sp>
       <p:sp>
         <p:nvSpPr>
-          <p:cNvPr id="9" name="Rectangle 8"/>
+          <p:cNvPr id="10" name="Rectangle 9"/>
           <p:cNvSpPr/>
           <p:nvPr/>
         </p:nvSpPr>
@@ -4565,7 +4670,7 @@
       </p:sp>
       <p:sp>
         <p:nvSpPr>
-          <p:cNvPr id="10" name="Rectangle 9"/>
+          <p:cNvPr id="11" name="Rectangle 10"/>
           <p:cNvSpPr/>
           <p:nvPr/>
         </p:nvSpPr>
@@ -4609,7 +4714,7 @@
       </p:sp>
       <p:sp>
         <p:nvSpPr>
-          <p:cNvPr id="11" name="TextBox 10"/>
+          <p:cNvPr id="12" name="TextBox 11"/>
           <p:cNvSpPr txBox="1"/>
           <p:nvPr/>
         </p:nvSpPr>
@@ -4644,7 +4749,7 @@
       </p:sp>
       <p:sp>
         <p:nvSpPr>
-          <p:cNvPr id="12" name="TextBox 11"/>
+          <p:cNvPr id="13" name="TextBox 12"/>
           <p:cNvSpPr txBox="1"/>
           <p:nvPr/>
         </p:nvSpPr>
@@ -4679,14 +4784,14 @@
       </p:sp>
       <p:sp>
         <p:nvSpPr>
-          <p:cNvPr id="13" name="TextBox 12"/>
+          <p:cNvPr id="14" name="TextBox 13"/>
           <p:cNvSpPr txBox="1"/>
           <p:nvPr/>
         </p:nvSpPr>
         <p:spPr>
           <a:xfrm>
-            <a:off x="3481577" y="3337560"/>
-            <a:ext cx="2338578" cy="457200"/>
+            <a:off x="3481577" y="3154680"/>
+            <a:ext cx="2338578" cy="411480"/>
           </a:xfrm>
           <a:prstGeom prst="rect">
             <a:avLst/>
@@ -4714,7 +4819,7 @@
       </p:sp>
       <p:sp>
         <p:nvSpPr>
-          <p:cNvPr id="14" name="Rectangle 13"/>
+          <p:cNvPr id="15" name="Rectangle 14"/>
           <p:cNvSpPr/>
           <p:nvPr/>
         </p:nvSpPr>
@@ -4758,7 +4863,7 @@
       </p:sp>
       <p:sp>
         <p:nvSpPr>
-          <p:cNvPr id="15" name="Rectangle 14"/>
+          <p:cNvPr id="16" name="Rectangle 15"/>
           <p:cNvSpPr/>
           <p:nvPr/>
         </p:nvSpPr>
@@ -4802,7 +4907,7 @@
       </p:sp>
       <p:sp>
         <p:nvSpPr>
-          <p:cNvPr id="16" name="TextBox 15"/>
+          <p:cNvPr id="17" name="TextBox 16"/>
           <p:cNvSpPr txBox="1"/>
           <p:nvPr/>
         </p:nvSpPr>
@@ -4837,7 +4942,7 @@
       </p:sp>
       <p:sp>
         <p:nvSpPr>
-          <p:cNvPr id="17" name="TextBox 16"/>
+          <p:cNvPr id="18" name="TextBox 17"/>
           <p:cNvSpPr txBox="1"/>
           <p:nvPr/>
         </p:nvSpPr>
@@ -4872,14 +4977,14 @@
       </p:sp>
       <p:sp>
         <p:nvSpPr>
-          <p:cNvPr id="18" name="TextBox 17"/>
+          <p:cNvPr id="19" name="TextBox 18"/>
           <p:cNvSpPr txBox="1"/>
           <p:nvPr/>
         </p:nvSpPr>
         <p:spPr>
           <a:xfrm>
-            <a:off x="6368796" y="3337560"/>
-            <a:ext cx="2338578" cy="457200"/>
+            <a:off x="6368796" y="3154680"/>
+            <a:ext cx="2338578" cy="411480"/>
           </a:xfrm>
           <a:prstGeom prst="rect">
             <a:avLst/>
@@ -4907,7 +5012,7 @@
       </p:sp>
       <p:sp>
         <p:nvSpPr>
-          <p:cNvPr id="19" name="Rectangle 18"/>
+          <p:cNvPr id="20" name="Rectangle 19"/>
           <p:cNvSpPr/>
           <p:nvPr/>
         </p:nvSpPr>
@@ -4951,7 +5056,7 @@
       </p:sp>
       <p:sp>
         <p:nvSpPr>
-          <p:cNvPr id="20" name="Rectangle 19"/>
+          <p:cNvPr id="21" name="Rectangle 20"/>
           <p:cNvSpPr/>
           <p:nvPr/>
         </p:nvSpPr>
@@ -4995,7 +5100,7 @@
       </p:sp>
       <p:sp>
         <p:nvSpPr>
-          <p:cNvPr id="21" name="TextBox 20"/>
+          <p:cNvPr id="22" name="TextBox 21"/>
           <p:cNvSpPr txBox="1"/>
           <p:nvPr/>
         </p:nvSpPr>
@@ -5030,7 +5135,7 @@
       </p:sp>
       <p:sp>
         <p:nvSpPr>
-          <p:cNvPr id="22" name="TextBox 21"/>
+          <p:cNvPr id="23" name="TextBox 22"/>
           <p:cNvSpPr txBox="1"/>
           <p:nvPr/>
         </p:nvSpPr>
@@ -5065,14 +5170,14 @@
       </p:sp>
       <p:sp>
         <p:nvSpPr>
-          <p:cNvPr id="23" name="TextBox 22"/>
+          <p:cNvPr id="24" name="TextBox 23"/>
           <p:cNvSpPr txBox="1"/>
           <p:nvPr/>
         </p:nvSpPr>
         <p:spPr>
           <a:xfrm>
-            <a:off x="9256014" y="3337560"/>
-            <a:ext cx="2338578" cy="457200"/>
+            <a:off x="9256014" y="3154680"/>
+            <a:ext cx="2338578" cy="411480"/>
           </a:xfrm>
           <a:prstGeom prst="rect">
             <a:avLst/>
@@ -5157,8 +5262,8 @@
         </p:nvSpPr>
         <p:spPr>
           <a:xfrm>
-            <a:off x="457200" y="6217920"/>
-            <a:ext cx="10360152" cy="365760"/>
+            <a:off x="7772400" y="91440"/>
+            <a:ext cx="3959352" cy="228600"/>
           </a:xfrm>
           <a:prstGeom prst="rect">
             <a:avLst/>
@@ -5171,15 +5276,15 @@
           </a:bodyPr>
           <a:lstStyle/>
           <a:p>
-            <a:pPr algn="l"/>
-            <a:r>
-              <a:rPr sz="1000" b="0" i="0">
+            <a:pPr algn="r"/>
+            <a:r>
+              <a:rPr sz="900" b="0" i="0">
                 <a:solidFill>
                   <a:srgbClr val="858585"/>
                 </a:solidFill>
                 <a:latin typeface="Segoe UI"/>
               </a:rPr>
-              <a:t>Fonte: CRM, extração 01/09/2026</a:t>
+              <a:t>2026-09-01</a:t>
             </a:r>
           </a:p>
         </p:txBody>
@@ -5192,8 +5297,8 @@
         </p:nvSpPr>
         <p:spPr>
           <a:xfrm>
-            <a:off x="10817352" y="6217920"/>
-            <a:ext cx="914400" cy="365760"/>
+            <a:off x="457200" y="6217920"/>
+            <a:ext cx="8531352" cy="365760"/>
           </a:xfrm>
           <a:prstGeom prst="rect">
             <a:avLst/>
@@ -5206,6 +5311,41 @@
           </a:bodyPr>
           <a:lstStyle/>
           <a:p>
+            <a:pPr algn="l"/>
+            <a:r>
+              <a:rPr sz="1000" b="0" i="0">
+                <a:solidFill>
+                  <a:srgbClr val="858585"/>
+                </a:solidFill>
+                <a:latin typeface="Segoe UI"/>
+              </a:rPr>
+              <a:t>Fonte: CRM, extração 01/09/2026</a:t>
+            </a:r>
+          </a:p>
+        </p:txBody>
+      </p:sp>
+      <p:sp>
+        <p:nvSpPr>
+          <p:cNvPr id="5" name="TextBox 4"/>
+          <p:cNvSpPr txBox="1"/>
+          <p:nvPr/>
+        </p:nvSpPr>
+        <p:spPr>
+          <a:xfrm>
+            <a:off x="10817352" y="6217920"/>
+            <a:ext cx="914400" cy="365760"/>
+          </a:xfrm>
+          <a:prstGeom prst="rect">
+            <a:avLst/>
+          </a:prstGeom>
+          <a:noFill/>
+        </p:spPr>
+        <p:txBody>
+          <a:bodyPr wrap="square" anchor="ctr" lIns="45720" rIns="45720" tIns="27432" bIns="27432">
+            <a:spAutoFit/>
+          </a:bodyPr>
+          <a:lstStyle/>
+          <a:p>
             <a:pPr algn="r"/>
             <a:r>
               <a:rPr sz="1000" b="0" i="0">
@@ -5221,7 +5361,7 @@
       </p:sp>
       <p:graphicFrame>
         <p:nvGraphicFramePr>
-          <p:cNvPr id="5" name="Chart 4"/>
+          <p:cNvPr id="6" name="Chart 5"/>
           <p:cNvGraphicFramePr>
             <a:graphicFrameLocks noGrp="1"/>
           </p:cNvGraphicFramePr>
@@ -5296,8 +5436,8 @@
         </p:nvSpPr>
         <p:spPr>
           <a:xfrm>
-            <a:off x="457200" y="6217920"/>
-            <a:ext cx="10360152" cy="365760"/>
+            <a:off x="7772400" y="91440"/>
+            <a:ext cx="3959352" cy="228600"/>
           </a:xfrm>
           <a:prstGeom prst="rect">
             <a:avLst/>
@@ -5310,15 +5450,15 @@
           </a:bodyPr>
           <a:lstStyle/>
           <a:p>
-            <a:pPr algn="l"/>
-            <a:r>
-              <a:rPr sz="1000" b="0" i="0">
+            <a:pPr algn="r"/>
+            <a:r>
+              <a:rPr sz="900" b="0" i="0">
                 <a:solidFill>
                   <a:srgbClr val="858585"/>
                 </a:solidFill>
                 <a:latin typeface="Segoe UI"/>
               </a:rPr>
-              <a:t>Fonte: CRM</a:t>
+              <a:t>2026-09-01</a:t>
             </a:r>
           </a:p>
         </p:txBody>
@@ -5331,8 +5471,8 @@
         </p:nvSpPr>
         <p:spPr>
           <a:xfrm>
-            <a:off x="10817352" y="6217920"/>
-            <a:ext cx="914400" cy="365760"/>
+            <a:off x="457200" y="6217920"/>
+            <a:ext cx="8531352" cy="365760"/>
           </a:xfrm>
           <a:prstGeom prst="rect">
             <a:avLst/>
@@ -5345,6 +5485,41 @@
           </a:bodyPr>
           <a:lstStyle/>
           <a:p>
+            <a:pPr algn="l"/>
+            <a:r>
+              <a:rPr sz="1000" b="0" i="0">
+                <a:solidFill>
+                  <a:srgbClr val="858585"/>
+                </a:solidFill>
+                <a:latin typeface="Segoe UI"/>
+              </a:rPr>
+              <a:t>Fonte: CRM</a:t>
+            </a:r>
+          </a:p>
+        </p:txBody>
+      </p:sp>
+      <p:sp>
+        <p:nvSpPr>
+          <p:cNvPr id="5" name="TextBox 4"/>
+          <p:cNvSpPr txBox="1"/>
+          <p:nvPr/>
+        </p:nvSpPr>
+        <p:spPr>
+          <a:xfrm>
+            <a:off x="10817352" y="6217920"/>
+            <a:ext cx="914400" cy="365760"/>
+          </a:xfrm>
+          <a:prstGeom prst="rect">
+            <a:avLst/>
+          </a:prstGeom>
+          <a:noFill/>
+        </p:spPr>
+        <p:txBody>
+          <a:bodyPr wrap="square" anchor="ctr" lIns="45720" rIns="45720" tIns="27432" bIns="27432">
+            <a:spAutoFit/>
+          </a:bodyPr>
+          <a:lstStyle/>
+          <a:p>
             <a:pPr algn="r"/>
             <a:r>
               <a:rPr sz="1000" b="0" i="0">
@@ -5360,7 +5535,7 @@
       </p:sp>
       <p:graphicFrame>
         <p:nvGraphicFramePr>
-          <p:cNvPr id="5" name="Chart 4"/>
+          <p:cNvPr id="6" name="Chart 5"/>
           <p:cNvGraphicFramePr>
             <a:graphicFrameLocks noGrp="1"/>
           </p:cNvGraphicFramePr>
@@ -5435,8 +5610,8 @@
         </p:nvSpPr>
         <p:spPr>
           <a:xfrm>
-            <a:off x="10817352" y="6217920"/>
-            <a:ext cx="914400" cy="365760"/>
+            <a:off x="7772400" y="91440"/>
+            <a:ext cx="3959352" cy="228600"/>
           </a:xfrm>
           <a:prstGeom prst="rect">
             <a:avLst/>
@@ -5451,6 +5626,41 @@
           <a:p>
             <a:pPr algn="r"/>
             <a:r>
+              <a:rPr sz="900" b="0" i="0">
+                <a:solidFill>
+                  <a:srgbClr val="858585"/>
+                </a:solidFill>
+                <a:latin typeface="Segoe UI"/>
+              </a:rPr>
+              <a:t>2026-09-01</a:t>
+            </a:r>
+          </a:p>
+        </p:txBody>
+      </p:sp>
+      <p:sp>
+        <p:nvSpPr>
+          <p:cNvPr id="4" name="TextBox 3"/>
+          <p:cNvSpPr txBox="1"/>
+          <p:nvPr/>
+        </p:nvSpPr>
+        <p:spPr>
+          <a:xfrm>
+            <a:off x="10817352" y="6217920"/>
+            <a:ext cx="914400" cy="365760"/>
+          </a:xfrm>
+          <a:prstGeom prst="rect">
+            <a:avLst/>
+          </a:prstGeom>
+          <a:noFill/>
+        </p:spPr>
+        <p:txBody>
+          <a:bodyPr wrap="square" anchor="ctr" lIns="45720" rIns="45720" tIns="27432" bIns="27432">
+            <a:spAutoFit/>
+          </a:bodyPr>
+          <a:lstStyle/>
+          <a:p>
+            <a:pPr algn="r"/>
+            <a:r>
               <a:rPr sz="1000" b="0" i="0">
                 <a:solidFill>
                   <a:srgbClr val="858585"/>
@@ -5464,7 +5674,7 @@
       </p:sp>
       <p:graphicFrame>
         <p:nvGraphicFramePr>
-          <p:cNvPr id="4" name="Table 3"/>
+          <p:cNvPr id="5" name="Table 4"/>
           <p:cNvGraphicFramePr>
             <a:graphicFrameLocks noGrp="1"/>
           </p:cNvGraphicFramePr>

--- a/examples/relatorio-de-vendas.pptx
+++ b/examples/relatorio-de-vendas.pptx
@@ -5361,7 +5361,7 @@
       </p:sp>
       <p:graphicFrame>
         <p:nvGraphicFramePr>
-          <p:cNvPr id="6" name="Chart 5"/>
+          <p:cNvPr id="6" name="Chart 5" descr="Sudeste responde por todo o gap da meta"/>
           <p:cNvGraphicFramePr>
             <a:graphicFrameLocks noGrp="1"/>
           </p:cNvGraphicFramePr>
@@ -5535,7 +5535,7 @@
       </p:sp>
       <p:graphicFrame>
         <p:nvGraphicFramePr>
-          <p:cNvPr id="6" name="Chart 5"/>
+          <p:cNvPr id="6" name="Chart 5" descr="Pipeline de R$ 18 mi cobre 2,1x a meta de setembro"/>
           <p:cNvGraphicFramePr>
             <a:graphicFrameLocks noGrp="1"/>
           </p:cNvGraphicFramePr>
